--- a/multiobject_examples_book/MO_EHVI/fig.pptx
+++ b/multiobject_examples_book/MO_EHVI/fig.pptx
@@ -6,6 +6,7 @@
   </p:sldMasterIdLst>
   <p:sldIdLst>
     <p:sldId id="256" r:id="rId2"/>
+    <p:sldId id="257" r:id="rId3"/>
   </p:sldIdLst>
   <p:sldSz cx="14400213" cy="10799763"/>
   <p:notesSz cx="6858000" cy="9144000"/>
@@ -243,7 +244,7 @@
           <a:p>
             <a:fld id="{CB043C71-DADB-4A33-AEC5-05BB719E0DA8}" type="datetimeFigureOut">
               <a:rPr lang="zh-CN" altLang="en-US" smtClean="0"/>
-              <a:t>2024/12/16</a:t>
+              <a:t>2024/12/22</a:t>
             </a:fld>
             <a:endParaRPr lang="zh-CN" altLang="en-US"/>
           </a:p>
@@ -413,7 +414,7 @@
           <a:p>
             <a:fld id="{CB043C71-DADB-4A33-AEC5-05BB719E0DA8}" type="datetimeFigureOut">
               <a:rPr lang="zh-CN" altLang="en-US" smtClean="0"/>
-              <a:t>2024/12/16</a:t>
+              <a:t>2024/12/22</a:t>
             </a:fld>
             <a:endParaRPr lang="zh-CN" altLang="en-US"/>
           </a:p>
@@ -593,7 +594,7 @@
           <a:p>
             <a:fld id="{CB043C71-DADB-4A33-AEC5-05BB719E0DA8}" type="datetimeFigureOut">
               <a:rPr lang="zh-CN" altLang="en-US" smtClean="0"/>
-              <a:t>2024/12/16</a:t>
+              <a:t>2024/12/22</a:t>
             </a:fld>
             <a:endParaRPr lang="zh-CN" altLang="en-US"/>
           </a:p>
@@ -763,7 +764,7 @@
           <a:p>
             <a:fld id="{CB043C71-DADB-4A33-AEC5-05BB719E0DA8}" type="datetimeFigureOut">
               <a:rPr lang="zh-CN" altLang="en-US" smtClean="0"/>
-              <a:t>2024/12/16</a:t>
+              <a:t>2024/12/22</a:t>
             </a:fld>
             <a:endParaRPr lang="zh-CN" altLang="en-US"/>
           </a:p>
@@ -1007,7 +1008,7 @@
           <a:p>
             <a:fld id="{CB043C71-DADB-4A33-AEC5-05BB719E0DA8}" type="datetimeFigureOut">
               <a:rPr lang="zh-CN" altLang="en-US" smtClean="0"/>
-              <a:t>2024/12/16</a:t>
+              <a:t>2024/12/22</a:t>
             </a:fld>
             <a:endParaRPr lang="zh-CN" altLang="en-US"/>
           </a:p>
@@ -1239,7 +1240,7 @@
           <a:p>
             <a:fld id="{CB043C71-DADB-4A33-AEC5-05BB719E0DA8}" type="datetimeFigureOut">
               <a:rPr lang="zh-CN" altLang="en-US" smtClean="0"/>
-              <a:t>2024/12/16</a:t>
+              <a:t>2024/12/22</a:t>
             </a:fld>
             <a:endParaRPr lang="zh-CN" altLang="en-US"/>
           </a:p>
@@ -1606,7 +1607,7 @@
           <a:p>
             <a:fld id="{CB043C71-DADB-4A33-AEC5-05BB719E0DA8}" type="datetimeFigureOut">
               <a:rPr lang="zh-CN" altLang="en-US" smtClean="0"/>
-              <a:t>2024/12/16</a:t>
+              <a:t>2024/12/22</a:t>
             </a:fld>
             <a:endParaRPr lang="zh-CN" altLang="en-US"/>
           </a:p>
@@ -1724,7 +1725,7 @@
           <a:p>
             <a:fld id="{CB043C71-DADB-4A33-AEC5-05BB719E0DA8}" type="datetimeFigureOut">
               <a:rPr lang="zh-CN" altLang="en-US" smtClean="0"/>
-              <a:t>2024/12/16</a:t>
+              <a:t>2024/12/22</a:t>
             </a:fld>
             <a:endParaRPr lang="zh-CN" altLang="en-US"/>
           </a:p>
@@ -1819,7 +1820,7 @@
           <a:p>
             <a:fld id="{CB043C71-DADB-4A33-AEC5-05BB719E0DA8}" type="datetimeFigureOut">
               <a:rPr lang="zh-CN" altLang="en-US" smtClean="0"/>
-              <a:t>2024/12/16</a:t>
+              <a:t>2024/12/22</a:t>
             </a:fld>
             <a:endParaRPr lang="zh-CN" altLang="en-US"/>
           </a:p>
@@ -2096,7 +2097,7 @@
           <a:p>
             <a:fld id="{CB043C71-DADB-4A33-AEC5-05BB719E0DA8}" type="datetimeFigureOut">
               <a:rPr lang="zh-CN" altLang="en-US" smtClean="0"/>
-              <a:t>2024/12/16</a:t>
+              <a:t>2024/12/22</a:t>
             </a:fld>
             <a:endParaRPr lang="zh-CN" altLang="en-US"/>
           </a:p>
@@ -2353,7 +2354,7 @@
           <a:p>
             <a:fld id="{CB043C71-DADB-4A33-AEC5-05BB719E0DA8}" type="datetimeFigureOut">
               <a:rPr lang="zh-CN" altLang="en-US" smtClean="0"/>
-              <a:t>2024/12/16</a:t>
+              <a:t>2024/12/22</a:t>
             </a:fld>
             <a:endParaRPr lang="zh-CN" altLang="en-US"/>
           </a:p>
@@ -2566,7 +2567,7 @@
           <a:p>
             <a:fld id="{CB043C71-DADB-4A33-AEC5-05BB719E0DA8}" type="datetimeFigureOut">
               <a:rPr lang="zh-CN" altLang="en-US" smtClean="0"/>
-              <a:t>2024/12/16</a:t>
+              <a:t>2024/12/22</a:t>
             </a:fld>
             <a:endParaRPr lang="zh-CN" altLang="en-US"/>
           </a:p>
@@ -3214,7 +3215,7 @@
         <p:spPr>
           <a:xfrm>
             <a:off x="2189001" y="5486400"/>
-            <a:ext cx="561372" cy="461665"/>
+            <a:ext cx="543739" cy="461665"/>
           </a:xfrm>
           <a:prstGeom prst="rect">
             <a:avLst/>
@@ -3232,7 +3233,7 @@
                 <a:latin typeface="Arial" panose="020B0604020202020204" pitchFamily="34" charset="0"/>
                 <a:cs typeface="Arial" panose="020B0604020202020204" pitchFamily="34" charset="0"/>
               </a:rPr>
-              <a:t>(d)</a:t>
+              <a:t>(c)</a:t>
             </a:r>
             <a:endParaRPr lang="zh-CN" altLang="en-US" sz="2400" dirty="0">
               <a:latin typeface="Arial" panose="020B0604020202020204" pitchFamily="34" charset="0"/>
@@ -3274,7 +3275,7 @@
                 <a:latin typeface="Arial" panose="020B0604020202020204" pitchFamily="34" charset="0"/>
                 <a:cs typeface="Arial" panose="020B0604020202020204" pitchFamily="34" charset="0"/>
               </a:rPr>
-              <a:t>(e)</a:t>
+              <a:t>(d)</a:t>
             </a:r>
             <a:endParaRPr lang="zh-CN" altLang="en-US" sz="2400" dirty="0">
               <a:latin typeface="Arial" panose="020B0604020202020204" pitchFamily="34" charset="0"/>
@@ -3343,10 +3344,450 @@
           </a:prstGeom>
         </p:spPr>
       </p:pic>
+      <p:pic>
+        <p:nvPicPr>
+          <p:cNvPr id="5" name="图片 4">
+            <a:extLst>
+              <a:ext uri="{FF2B5EF4-FFF2-40B4-BE49-F238E27FC236}">
+                <a16:creationId xmlns:a16="http://schemas.microsoft.com/office/drawing/2014/main" id="{809FA5D5-AE4D-536B-8F0C-C2F86C9CBC90}"/>
+              </a:ext>
+            </a:extLst>
+          </p:cNvPr>
+          <p:cNvPicPr>
+            <a:picLocks noChangeAspect="1"/>
+          </p:cNvPicPr>
+          <p:nvPr/>
+        </p:nvPicPr>
+        <p:blipFill>
+          <a:blip r:embed="rId9"/>
+          <a:stretch>
+            <a:fillRect/>
+          </a:stretch>
+        </p:blipFill>
+        <p:spPr>
+          <a:xfrm>
+            <a:off x="5149353" y="1288027"/>
+            <a:ext cx="1274325" cy="453092"/>
+          </a:xfrm>
+          <a:prstGeom prst="rect">
+            <a:avLst/>
+          </a:prstGeom>
+        </p:spPr>
+      </p:pic>
+      <p:pic>
+        <p:nvPicPr>
+          <p:cNvPr id="6" name="图片 5">
+            <a:extLst>
+              <a:ext uri="{FF2B5EF4-FFF2-40B4-BE49-F238E27FC236}">
+                <a16:creationId xmlns:a16="http://schemas.microsoft.com/office/drawing/2014/main" id="{7B1AF078-C784-B661-8ACD-7EC3C3EBC8CA}"/>
+              </a:ext>
+            </a:extLst>
+          </p:cNvPr>
+          <p:cNvPicPr>
+            <a:picLocks noChangeAspect="1"/>
+          </p:cNvPicPr>
+          <p:nvPr/>
+        </p:nvPicPr>
+        <p:blipFill>
+          <a:blip r:embed="rId9"/>
+          <a:stretch>
+            <a:fillRect/>
+          </a:stretch>
+        </p:blipFill>
+        <p:spPr>
+          <a:xfrm>
+            <a:off x="10330933" y="1267021"/>
+            <a:ext cx="1274325" cy="453092"/>
+          </a:xfrm>
+          <a:prstGeom prst="rect">
+            <a:avLst/>
+          </a:prstGeom>
+        </p:spPr>
+      </p:pic>
+      <p:pic>
+        <p:nvPicPr>
+          <p:cNvPr id="8" name="图片 7">
+            <a:extLst>
+              <a:ext uri="{FF2B5EF4-FFF2-40B4-BE49-F238E27FC236}">
+                <a16:creationId xmlns:a16="http://schemas.microsoft.com/office/drawing/2014/main" id="{5F09922B-EE6F-AA0D-316F-768DFF2AE844}"/>
+              </a:ext>
+            </a:extLst>
+          </p:cNvPr>
+          <p:cNvPicPr>
+            <a:picLocks noChangeAspect="1"/>
+          </p:cNvPicPr>
+          <p:nvPr/>
+        </p:nvPicPr>
+        <p:blipFill>
+          <a:blip r:embed="rId9"/>
+          <a:stretch>
+            <a:fillRect/>
+          </a:stretch>
+        </p:blipFill>
+        <p:spPr>
+          <a:xfrm>
+            <a:off x="10149958" y="6603377"/>
+            <a:ext cx="1455300" cy="453092"/>
+          </a:xfrm>
+          <a:prstGeom prst="rect">
+            <a:avLst/>
+          </a:prstGeom>
+        </p:spPr>
+      </p:pic>
+      <p:pic>
+        <p:nvPicPr>
+          <p:cNvPr id="10" name="图片 9">
+            <a:extLst>
+              <a:ext uri="{FF2B5EF4-FFF2-40B4-BE49-F238E27FC236}">
+                <a16:creationId xmlns:a16="http://schemas.microsoft.com/office/drawing/2014/main" id="{EBA33801-BDBF-1D94-9478-2E713D317640}"/>
+              </a:ext>
+            </a:extLst>
+          </p:cNvPr>
+          <p:cNvPicPr>
+            <a:picLocks noChangeAspect="1"/>
+          </p:cNvPicPr>
+          <p:nvPr/>
+        </p:nvPicPr>
+        <p:blipFill>
+          <a:blip r:embed="rId9"/>
+          <a:stretch>
+            <a:fillRect/>
+          </a:stretch>
+        </p:blipFill>
+        <p:spPr>
+          <a:xfrm>
+            <a:off x="5058865" y="6638875"/>
+            <a:ext cx="1455300" cy="453092"/>
+          </a:xfrm>
+          <a:prstGeom prst="rect">
+            <a:avLst/>
+          </a:prstGeom>
+        </p:spPr>
+      </p:pic>
+      <p:sp>
+        <p:nvSpPr>
+          <p:cNvPr id="12" name="文本框 11">
+            <a:extLst>
+              <a:ext uri="{FF2B5EF4-FFF2-40B4-BE49-F238E27FC236}">
+                <a16:creationId xmlns:a16="http://schemas.microsoft.com/office/drawing/2014/main" id="{BB663439-A05E-294B-3262-AEF90A5E808F}"/>
+              </a:ext>
+            </a:extLst>
+          </p:cNvPr>
+          <p:cNvSpPr txBox="1"/>
+          <p:nvPr/>
+        </p:nvSpPr>
+        <p:spPr>
+          <a:xfrm>
+            <a:off x="5100458" y="1257496"/>
+            <a:ext cx="1141659" cy="307777"/>
+          </a:xfrm>
+          <a:prstGeom prst="rect">
+            <a:avLst/>
+          </a:prstGeom>
+          <a:noFill/>
+        </p:spPr>
+        <p:txBody>
+          <a:bodyPr wrap="none" rtlCol="0">
+            <a:spAutoFit/>
+          </a:bodyPr>
+          <a:lstStyle/>
+          <a:p>
+            <a:r>
+              <a:rPr lang="en-US" altLang="zh-CN" sz="1400" dirty="0">
+                <a:latin typeface="Arial" panose="020B0604020202020204" pitchFamily="34" charset="0"/>
+                <a:cs typeface="Arial" panose="020B0604020202020204" pitchFamily="34" charset="0"/>
+              </a:rPr>
+              <a:t>SVM values</a:t>
+            </a:r>
+            <a:endParaRPr lang="zh-CN" altLang="en-US" sz="1400" dirty="0">
+              <a:latin typeface="Arial" panose="020B0604020202020204" pitchFamily="34" charset="0"/>
+              <a:cs typeface="Arial" panose="020B0604020202020204" pitchFamily="34" charset="0"/>
+            </a:endParaRPr>
+          </a:p>
+        </p:txBody>
+      </p:sp>
+      <p:sp>
+        <p:nvSpPr>
+          <p:cNvPr id="16" name="文本框 15">
+            <a:extLst>
+              <a:ext uri="{FF2B5EF4-FFF2-40B4-BE49-F238E27FC236}">
+                <a16:creationId xmlns:a16="http://schemas.microsoft.com/office/drawing/2014/main" id="{6F1636CA-4E91-FAA2-5DA5-2BAC1ACCA630}"/>
+              </a:ext>
+            </a:extLst>
+          </p:cNvPr>
+          <p:cNvSpPr txBox="1"/>
+          <p:nvPr/>
+        </p:nvSpPr>
+        <p:spPr>
+          <a:xfrm>
+            <a:off x="10306778" y="1282159"/>
+            <a:ext cx="1141659" cy="307777"/>
+          </a:xfrm>
+          <a:prstGeom prst="rect">
+            <a:avLst/>
+          </a:prstGeom>
+          <a:noFill/>
+        </p:spPr>
+        <p:txBody>
+          <a:bodyPr wrap="none" rtlCol="0">
+            <a:spAutoFit/>
+          </a:bodyPr>
+          <a:lstStyle/>
+          <a:p>
+            <a:r>
+              <a:rPr lang="en-US" altLang="zh-CN" sz="1400" dirty="0">
+                <a:latin typeface="Arial" panose="020B0604020202020204" pitchFamily="34" charset="0"/>
+                <a:cs typeface="Arial" panose="020B0604020202020204" pitchFamily="34" charset="0"/>
+              </a:rPr>
+              <a:t>SVM values</a:t>
+            </a:r>
+            <a:endParaRPr lang="zh-CN" altLang="en-US" sz="1400" dirty="0">
+              <a:latin typeface="Arial" panose="020B0604020202020204" pitchFamily="34" charset="0"/>
+              <a:cs typeface="Arial" panose="020B0604020202020204" pitchFamily="34" charset="0"/>
+            </a:endParaRPr>
+          </a:p>
+        </p:txBody>
+      </p:sp>
+      <p:sp>
+        <p:nvSpPr>
+          <p:cNvPr id="19" name="文本框 18">
+            <a:extLst>
+              <a:ext uri="{FF2B5EF4-FFF2-40B4-BE49-F238E27FC236}">
+                <a16:creationId xmlns:a16="http://schemas.microsoft.com/office/drawing/2014/main" id="{237AF100-148D-65AF-8F28-F7775A8E764E}"/>
+              </a:ext>
+            </a:extLst>
+          </p:cNvPr>
+          <p:cNvSpPr txBox="1"/>
+          <p:nvPr/>
+        </p:nvSpPr>
+        <p:spPr>
+          <a:xfrm>
+            <a:off x="5109982" y="6590007"/>
+            <a:ext cx="1141659" cy="307777"/>
+          </a:xfrm>
+          <a:prstGeom prst="rect">
+            <a:avLst/>
+          </a:prstGeom>
+          <a:noFill/>
+        </p:spPr>
+        <p:txBody>
+          <a:bodyPr wrap="none" rtlCol="0">
+            <a:spAutoFit/>
+          </a:bodyPr>
+          <a:lstStyle/>
+          <a:p>
+            <a:r>
+              <a:rPr lang="en-US" altLang="zh-CN" sz="1400" dirty="0">
+                <a:latin typeface="Arial" panose="020B0604020202020204" pitchFamily="34" charset="0"/>
+                <a:cs typeface="Arial" panose="020B0604020202020204" pitchFamily="34" charset="0"/>
+              </a:rPr>
+              <a:t>SVM values</a:t>
+            </a:r>
+            <a:endParaRPr lang="zh-CN" altLang="en-US" sz="1400" dirty="0">
+              <a:latin typeface="Arial" panose="020B0604020202020204" pitchFamily="34" charset="0"/>
+              <a:cs typeface="Arial" panose="020B0604020202020204" pitchFamily="34" charset="0"/>
+            </a:endParaRPr>
+          </a:p>
+        </p:txBody>
+      </p:sp>
+      <p:sp>
+        <p:nvSpPr>
+          <p:cNvPr id="20" name="文本框 19">
+            <a:extLst>
+              <a:ext uri="{FF2B5EF4-FFF2-40B4-BE49-F238E27FC236}">
+                <a16:creationId xmlns:a16="http://schemas.microsoft.com/office/drawing/2014/main" id="{4E9FA7A8-5D00-A093-6ABC-159D332FC260}"/>
+              </a:ext>
+            </a:extLst>
+          </p:cNvPr>
+          <p:cNvSpPr txBox="1"/>
+          <p:nvPr/>
+        </p:nvSpPr>
+        <p:spPr>
+          <a:xfrm>
+            <a:off x="10302358" y="6571798"/>
+            <a:ext cx="1141659" cy="307777"/>
+          </a:xfrm>
+          <a:prstGeom prst="rect">
+            <a:avLst/>
+          </a:prstGeom>
+          <a:noFill/>
+        </p:spPr>
+        <p:txBody>
+          <a:bodyPr wrap="none" rtlCol="0">
+            <a:spAutoFit/>
+          </a:bodyPr>
+          <a:lstStyle/>
+          <a:p>
+            <a:r>
+              <a:rPr lang="en-US" altLang="zh-CN" sz="1400" dirty="0">
+                <a:latin typeface="Arial" panose="020B0604020202020204" pitchFamily="34" charset="0"/>
+                <a:cs typeface="Arial" panose="020B0604020202020204" pitchFamily="34" charset="0"/>
+              </a:rPr>
+              <a:t>SVM values</a:t>
+            </a:r>
+            <a:endParaRPr lang="zh-CN" altLang="en-US" sz="1400" dirty="0">
+              <a:latin typeface="Arial" panose="020B0604020202020204" pitchFamily="34" charset="0"/>
+              <a:cs typeface="Arial" panose="020B0604020202020204" pitchFamily="34" charset="0"/>
+            </a:endParaRPr>
+          </a:p>
+        </p:txBody>
+      </p:sp>
     </p:spTree>
     <p:extLst>
       <p:ext uri="{BB962C8B-B14F-4D97-AF65-F5344CB8AC3E}">
         <p14:creationId xmlns:p14="http://schemas.microsoft.com/office/powerpoint/2010/main" val="1444005626"/>
+      </p:ext>
+    </p:extLst>
+  </p:cSld>
+  <p:clrMapOvr>
+    <a:masterClrMapping/>
+  </p:clrMapOvr>
+</p:sld>
+</file>
+
+<file path=ppt/slides/slide2.xml><?xml version="1.0" encoding="utf-8"?>
+<p:sld xmlns:a="http://schemas.openxmlformats.org/drawingml/2006/main" xmlns:r="http://schemas.openxmlformats.org/officeDocument/2006/relationships" xmlns:p="http://schemas.openxmlformats.org/presentationml/2006/main">
+  <p:cSld>
+    <p:spTree>
+      <p:nvGrpSpPr>
+        <p:cNvPr id="1" name="">
+          <a:extLst>
+            <a:ext uri="{FF2B5EF4-FFF2-40B4-BE49-F238E27FC236}">
+              <a16:creationId xmlns:a16="http://schemas.microsoft.com/office/drawing/2014/main" id="{BC890C83-33A7-1A3E-1E19-C3E08773EE11}"/>
+            </a:ext>
+          </a:extLst>
+        </p:cNvPr>
+        <p:cNvGrpSpPr/>
+        <p:nvPr/>
+      </p:nvGrpSpPr>
+      <p:grpSpPr>
+        <a:xfrm>
+          <a:off x="0" y="0"/>
+          <a:ext cx="0" cy="0"/>
+          <a:chOff x="0" y="0"/>
+          <a:chExt cx="0" cy="0"/>
+        </a:xfrm>
+      </p:grpSpPr>
+      <p:pic>
+        <p:nvPicPr>
+          <p:cNvPr id="3" name="图片 2">
+            <a:extLst>
+              <a:ext uri="{FF2B5EF4-FFF2-40B4-BE49-F238E27FC236}">
+                <a16:creationId xmlns:a16="http://schemas.microsoft.com/office/drawing/2014/main" id="{22898C03-0C14-47EC-7A34-3FD7F923B8C9}"/>
+              </a:ext>
+            </a:extLst>
+          </p:cNvPr>
+          <p:cNvPicPr>
+            <a:picLocks noChangeAspect="1"/>
+          </p:cNvPicPr>
+          <p:nvPr/>
+        </p:nvPicPr>
+        <p:blipFill>
+          <a:blip r:embed="rId2">
+            <a:extLst>
+              <a:ext uri="{28A0092B-C50C-407E-A947-70E740481C1C}">
+                <a14:useLocalDpi xmlns:a14="http://schemas.microsoft.com/office/drawing/2010/main" val="0"/>
+              </a:ext>
+            </a:extLst>
+          </a:blip>
+          <a:stretch>
+            <a:fillRect/>
+          </a:stretch>
+        </p:blipFill>
+        <p:spPr>
+          <a:xfrm>
+            <a:off x="3112195" y="1250671"/>
+            <a:ext cx="7914393" cy="7914393"/>
+          </a:xfrm>
+          <a:prstGeom prst="rect">
+            <a:avLst/>
+          </a:prstGeom>
+        </p:spPr>
+      </p:pic>
+      <p:cxnSp>
+        <p:nvCxnSpPr>
+          <p:cNvPr id="5" name="直接连接符 4">
+            <a:extLst>
+              <a:ext uri="{FF2B5EF4-FFF2-40B4-BE49-F238E27FC236}">
+                <a16:creationId xmlns:a16="http://schemas.microsoft.com/office/drawing/2014/main" id="{B2B2B149-FF4A-C682-D114-445EE9684CA8}"/>
+              </a:ext>
+            </a:extLst>
+          </p:cNvPr>
+          <p:cNvCxnSpPr/>
+          <p:nvPr/>
+        </p:nvCxnSpPr>
+        <p:spPr>
+          <a:xfrm flipV="1">
+            <a:off x="4374778" y="2187388"/>
+            <a:ext cx="0" cy="6078071"/>
+          </a:xfrm>
+          <a:prstGeom prst="line">
+            <a:avLst/>
+          </a:prstGeom>
+          <a:ln w="9525">
+            <a:prstDash val="dash"/>
+          </a:ln>
+        </p:spPr>
+        <p:style>
+          <a:lnRef idx="1">
+            <a:schemeClr val="dk1"/>
+          </a:lnRef>
+          <a:fillRef idx="0">
+            <a:schemeClr val="dk1"/>
+          </a:fillRef>
+          <a:effectRef idx="0">
+            <a:schemeClr val="dk1"/>
+          </a:effectRef>
+          <a:fontRef idx="minor">
+            <a:schemeClr val="tx1"/>
+          </a:fontRef>
+        </p:style>
+      </p:cxnSp>
+      <p:cxnSp>
+        <p:nvCxnSpPr>
+          <p:cNvPr id="6" name="直接连接符 5">
+            <a:extLst>
+              <a:ext uri="{FF2B5EF4-FFF2-40B4-BE49-F238E27FC236}">
+                <a16:creationId xmlns:a16="http://schemas.microsoft.com/office/drawing/2014/main" id="{73029E9C-ED17-BB2C-45EC-FD29DBFE3272}"/>
+              </a:ext>
+            </a:extLst>
+          </p:cNvPr>
+          <p:cNvCxnSpPr>
+            <a:cxnSpLocks/>
+          </p:cNvCxnSpPr>
+          <p:nvPr/>
+        </p:nvCxnSpPr>
+        <p:spPr>
+          <a:xfrm>
+            <a:off x="4105836" y="7530354"/>
+            <a:ext cx="6131859" cy="0"/>
+          </a:xfrm>
+          <a:prstGeom prst="line">
+            <a:avLst/>
+          </a:prstGeom>
+          <a:ln w="9525">
+            <a:prstDash val="dash"/>
+          </a:ln>
+        </p:spPr>
+        <p:style>
+          <a:lnRef idx="1">
+            <a:schemeClr val="dk1"/>
+          </a:lnRef>
+          <a:fillRef idx="0">
+            <a:schemeClr val="dk1"/>
+          </a:fillRef>
+          <a:effectRef idx="0">
+            <a:schemeClr val="dk1"/>
+          </a:effectRef>
+          <a:fontRef idx="minor">
+            <a:schemeClr val="tx1"/>
+          </a:fontRef>
+        </p:style>
+      </p:cxnSp>
+    </p:spTree>
+    <p:extLst>
+      <p:ext uri="{BB962C8B-B14F-4D97-AF65-F5344CB8AC3E}">
+        <p14:creationId xmlns:p14="http://schemas.microsoft.com/office/powerpoint/2010/main" val="642851957"/>
       </p:ext>
     </p:extLst>
   </p:cSld>
